--- a/booklets/mars_platform.pptx
+++ b/booklets/mars_platform.pptx
@@ -1860,7 +1860,7 @@
                 <a:ea typeface="Calibri" pitchFamily="34" charset="-122"/>
                 <a:cs typeface="Calibri" pitchFamily="34" charset="-120"/>
               </a:rPr>
-              <a:t>Mars IoT</a:t>
+              <a:t>Mars</a:t>
             </a:r>
             <a:endParaRPr lang="en-US" sz="4600" dirty="0"/>
           </a:p>
@@ -6358,7 +6358,7 @@
         </p:nvSpPr>
         <p:spPr>
           <a:xfrm>
-            <a:off x="4206240" y="1705356"/>
+            <a:off x="4178808" y="1696974"/>
             <a:ext cx="914400" cy="210312"/>
           </a:xfrm>
           <a:prstGeom prst="rect">
@@ -7379,14 +7379,82 @@
       </p:sp>
       <p:sp>
         <p:nvSpPr>
-          <p:cNvPr id="45" name="Text 35"/>
-          <p:cNvSpPr/>
-          <p:nvPr/>
-        </p:nvSpPr>
-        <p:spPr>
-          <a:xfrm>
-            <a:off x="7886700" y="1824228"/>
-            <a:ext cx="1005840" cy="237744"/>
+          <p:cNvPr id="46" name="Text 36"/>
+          <p:cNvSpPr/>
+          <p:nvPr/>
+        </p:nvSpPr>
+        <p:spPr>
+          <a:xfrm>
+            <a:off x="5897880" y="1907286"/>
+            <a:ext cx="2112264" cy="644652"/>
+          </a:xfrm>
+          <a:prstGeom prst="rect">
+            <a:avLst/>
+          </a:prstGeom>
+          <a:noFill/>
+          <a:ln/>
+        </p:spPr>
+        <p:txBody>
+          <a:bodyPr wrap="square" rtlCol="0" anchor="ctr"/>
+          <a:lstStyle/>
+          <a:p>
+            <a:pPr marL="0" indent="0">
+              <a:buNone/>
+            </a:pPr>
+            <a:r>
+              <a:rPr lang="en-US" sz="1200" dirty="0">
+                <a:solidFill>
+                  <a:srgbClr val="1A2030"/>
+                </a:solidFill>
+              </a:rPr>
+              <a:t>Manually trigger a refresh of all actuator states via a dashboard button to verify true physical status.</a:t>
+            </a:r>
+            <a:endParaRPr lang="en-US" sz="1200" dirty="0"/>
+          </a:p>
+        </p:txBody>
+      </p:sp>
+      <p:sp>
+        <p:nvSpPr>
+          <p:cNvPr id="48" name="Shape 38"/>
+          <p:cNvSpPr/>
+          <p:nvPr/>
+        </p:nvSpPr>
+        <p:spPr>
+          <a:xfrm>
+            <a:off x="5477256" y="3933444"/>
+            <a:ext cx="3520440" cy="54864"/>
+          </a:xfrm>
+          <a:prstGeom prst="rect">
+            <a:avLst/>
+          </a:prstGeom>
+          <a:solidFill>
+            <a:srgbClr val="1ABC9C"/>
+          </a:solidFill>
+          <a:ln w="12700">
+            <a:solidFill>
+              <a:srgbClr val="1ABC9C"/>
+            </a:solidFill>
+            <a:prstDash val="solid"/>
+          </a:ln>
+        </p:spPr>
+        <p:txBody>
+          <a:bodyPr/>
+          <a:lstStyle/>
+          <a:p>
+            <a:endParaRPr lang="en-GB"/>
+          </a:p>
+        </p:txBody>
+      </p:sp>
+      <p:sp>
+        <p:nvSpPr>
+          <p:cNvPr id="54" name="Text 44"/>
+          <p:cNvSpPr/>
+          <p:nvPr/>
+        </p:nvSpPr>
+        <p:spPr>
+          <a:xfrm>
+            <a:off x="5623560" y="3639312"/>
+            <a:ext cx="347472" cy="256032"/>
           </a:xfrm>
           <a:prstGeom prst="rect">
             <a:avLst/>
@@ -7407,7 +7475,7 @@
                   <a:srgbClr val="FFFFFF"/>
                 </a:solidFill>
               </a:rPr>
-              <a:t>Operator</a:t>
+              <a:t>8</a:t>
             </a:r>
             <a:endParaRPr lang="en-US" sz="1200" dirty="0"/>
           </a:p>
@@ -7415,14 +7483,14 @@
       </p:sp>
       <p:sp>
         <p:nvSpPr>
-          <p:cNvPr id="46" name="Text 36"/>
-          <p:cNvSpPr/>
-          <p:nvPr/>
-        </p:nvSpPr>
-        <p:spPr>
-          <a:xfrm>
-            <a:off x="5897880" y="1907286"/>
-            <a:ext cx="2112264" cy="644652"/>
+          <p:cNvPr id="55" name="Text 45"/>
+          <p:cNvSpPr/>
+          <p:nvPr/>
+        </p:nvSpPr>
+        <p:spPr>
+          <a:xfrm>
+            <a:off x="6053328" y="3639312"/>
+            <a:ext cx="2697480" cy="256032"/>
           </a:xfrm>
           <a:prstGeom prst="rect">
             <a:avLst/>
@@ -7440,10 +7508,10 @@
             <a:r>
               <a:rPr lang="en-US" sz="1200" dirty="0">
                 <a:solidFill>
-                  <a:srgbClr val="1A2030"/>
-                </a:solidFill>
-              </a:rPr>
-              <a:t>Manually trigger a refresh of all actuator states via a dashboard button to verify true physical status.</a:t>
+                  <a:srgbClr val="E8ECF2"/>
+                </a:solidFill>
+              </a:rPr>
+              <a:t>Rule Management (CRUD)</a:t>
             </a:r>
             <a:endParaRPr lang="en-US" sz="1200" dirty="0"/>
           </a:p>
@@ -7451,14 +7519,278 @@
       </p:sp>
       <p:sp>
         <p:nvSpPr>
-          <p:cNvPr id="47" name="Shape 37"/>
-          <p:cNvSpPr/>
-          <p:nvPr/>
-        </p:nvSpPr>
-        <p:spPr>
-          <a:xfrm>
-            <a:off x="5440680" y="2834640"/>
-            <a:ext cx="3520440" cy="1984248"/>
+          <p:cNvPr id="56" name="Shape 46"/>
+          <p:cNvSpPr/>
+          <p:nvPr/>
+        </p:nvSpPr>
+        <p:spPr>
+          <a:xfrm>
+            <a:off x="5623560" y="3986784"/>
+            <a:ext cx="347472" cy="256032"/>
+          </a:xfrm>
+          <a:prstGeom prst="rect">
+            <a:avLst/>
+          </a:prstGeom>
+          <a:solidFill>
+            <a:srgbClr val="1ABC9C"/>
+          </a:solidFill>
+          <a:ln w="12700">
+            <a:solidFill>
+              <a:srgbClr val="1ABC9C"/>
+            </a:solidFill>
+            <a:prstDash val="solid"/>
+          </a:ln>
+        </p:spPr>
+        <p:txBody>
+          <a:bodyPr/>
+          <a:lstStyle/>
+          <a:p>
+            <a:endParaRPr lang="en-GB"/>
+          </a:p>
+        </p:txBody>
+      </p:sp>
+      <p:sp>
+        <p:nvSpPr>
+          <p:cNvPr id="57" name="Text 47"/>
+          <p:cNvSpPr/>
+          <p:nvPr/>
+        </p:nvSpPr>
+        <p:spPr>
+          <a:xfrm>
+            <a:off x="5623560" y="3986784"/>
+            <a:ext cx="347472" cy="256032"/>
+          </a:xfrm>
+          <a:prstGeom prst="rect">
+            <a:avLst/>
+          </a:prstGeom>
+          <a:noFill/>
+          <a:ln/>
+        </p:spPr>
+        <p:txBody>
+          <a:bodyPr wrap="square" rtlCol="0" anchor="ctr"/>
+          <a:lstStyle/>
+          <a:p>
+            <a:pPr marL="0" indent="0" algn="ctr">
+              <a:buNone/>
+            </a:pPr>
+            <a:r>
+              <a:rPr lang="en-US" sz="1200" b="1" dirty="0">
+                <a:solidFill>
+                  <a:srgbClr val="FFFFFF"/>
+                </a:solidFill>
+              </a:rPr>
+              <a:t>7</a:t>
+            </a:r>
+            <a:endParaRPr lang="en-US" sz="1200" dirty="0"/>
+          </a:p>
+        </p:txBody>
+      </p:sp>
+      <p:sp>
+        <p:nvSpPr>
+          <p:cNvPr id="58" name="Text 48"/>
+          <p:cNvSpPr/>
+          <p:nvPr/>
+        </p:nvSpPr>
+        <p:spPr>
+          <a:xfrm>
+            <a:off x="6053328" y="3986784"/>
+            <a:ext cx="2697480" cy="256032"/>
+          </a:xfrm>
+          <a:prstGeom prst="rect">
+            <a:avLst/>
+          </a:prstGeom>
+          <a:noFill/>
+          <a:ln/>
+        </p:spPr>
+        <p:txBody>
+          <a:bodyPr wrap="square" rtlCol="0" anchor="ctr"/>
+          <a:lstStyle/>
+          <a:p>
+            <a:pPr marL="0" indent="0">
+              <a:buNone/>
+            </a:pPr>
+            <a:r>
+              <a:rPr lang="en-US" sz="1200" dirty="0">
+                <a:solidFill>
+                  <a:srgbClr val="E8ECF2"/>
+                </a:solidFill>
+              </a:rPr>
+              <a:t>System Resilience</a:t>
+            </a:r>
+            <a:endParaRPr lang="en-US" sz="1200" dirty="0"/>
+          </a:p>
+        </p:txBody>
+      </p:sp>
+      <p:sp>
+        <p:nvSpPr>
+          <p:cNvPr id="61" name="Text 51"/>
+          <p:cNvSpPr/>
+          <p:nvPr/>
+        </p:nvSpPr>
+        <p:spPr>
+          <a:xfrm>
+            <a:off x="6053328" y="4334256"/>
+            <a:ext cx="2697480" cy="256032"/>
+          </a:xfrm>
+          <a:prstGeom prst="rect">
+            <a:avLst/>
+          </a:prstGeom>
+          <a:noFill/>
+          <a:ln/>
+        </p:spPr>
+        <p:txBody>
+          <a:bodyPr wrap="square" rtlCol="0" anchor="ctr"/>
+          <a:lstStyle/>
+          <a:p>
+            <a:pPr marL="0" indent="0">
+              <a:buNone/>
+            </a:pPr>
+            <a:r>
+              <a:rPr lang="en-US" sz="1200" dirty="0">
+                <a:solidFill>
+                  <a:srgbClr val="E8ECF2"/>
+                </a:solidFill>
+              </a:rPr>
+              <a:t>Config &amp; Actuators</a:t>
+            </a:r>
+            <a:endParaRPr lang="en-US" sz="1200" dirty="0"/>
+          </a:p>
+        </p:txBody>
+      </p:sp>
+      <p:sp>
+        <p:nvSpPr>
+          <p:cNvPr id="64" name="Shape 54"/>
+          <p:cNvSpPr/>
+          <p:nvPr/>
+        </p:nvSpPr>
+        <p:spPr>
+          <a:xfrm>
+            <a:off x="0" y="4937760"/>
+            <a:ext cx="9144000" cy="205740"/>
+          </a:xfrm>
+          <a:prstGeom prst="rect">
+            <a:avLst/>
+          </a:prstGeom>
+          <a:solidFill>
+            <a:srgbClr val="0D1B3E"/>
+          </a:solidFill>
+          <a:ln w="12700">
+            <a:solidFill>
+              <a:srgbClr val="0D1B3E"/>
+            </a:solidFill>
+            <a:prstDash val="solid"/>
+          </a:ln>
+        </p:spPr>
+        <p:txBody>
+          <a:bodyPr/>
+          <a:lstStyle/>
+          <a:p>
+            <a:endParaRPr lang="en-GB"/>
+          </a:p>
+        </p:txBody>
+      </p:sp>
+      <p:sp>
+        <p:nvSpPr>
+          <p:cNvPr id="65" name="Text 55"/>
+          <p:cNvSpPr/>
+          <p:nvPr/>
+        </p:nvSpPr>
+        <p:spPr>
+          <a:xfrm>
+            <a:off x="0" y="4937760"/>
+            <a:ext cx="9144000" cy="205740"/>
+          </a:xfrm>
+          <a:prstGeom prst="rect">
+            <a:avLst/>
+          </a:prstGeom>
+          <a:noFill/>
+          <a:ln/>
+        </p:spPr>
+        <p:txBody>
+          <a:bodyPr wrap="square" rtlCol="0" anchor="ctr"/>
+          <a:lstStyle/>
+          <a:p>
+            <a:pPr marL="0" indent="0" algn="ctr">
+              <a:buNone/>
+            </a:pPr>
+            <a:r>
+              <a:rPr lang="en-US" sz="1200" dirty="0">
+                <a:solidFill>
+                  <a:srgbClr val="8899AA"/>
+                </a:solidFill>
+              </a:rPr>
+              <a:t>Mars Automation Platform  ·  Lab Advanced Programming 2025/2026</a:t>
+            </a:r>
+            <a:endParaRPr lang="en-US" sz="1200" dirty="0"/>
+          </a:p>
+        </p:txBody>
+      </p:sp>
+      <p:sp>
+        <p:nvSpPr>
+          <p:cNvPr id="66" name="Shape 9">
+            <a:extLst>
+              <a:ext uri="{FF2B5EF4-FFF2-40B4-BE49-F238E27FC236}">
+                <a16:creationId xmlns:a16="http://schemas.microsoft.com/office/drawing/2014/main" id="{901B0566-FAB6-680B-1947-D8E81679FC61}"/>
+              </a:ext>
+            </a:extLst>
+          </p:cNvPr>
+          <p:cNvSpPr/>
+          <p:nvPr/>
+        </p:nvSpPr>
+        <p:spPr>
+          <a:xfrm>
+            <a:off x="7863840" y="1833372"/>
+            <a:ext cx="1051560" cy="228600"/>
+          </a:xfrm>
+          <a:prstGeom prst="rect">
+            <a:avLst/>
+          </a:prstGeom>
+          <a:solidFill>
+            <a:srgbClr val="1ABC9C"/>
+          </a:solidFill>
+          <a:ln w="12700">
+            <a:solidFill>
+              <a:srgbClr val="1ABC9C"/>
+            </a:solidFill>
+            <a:prstDash val="solid"/>
+          </a:ln>
+        </p:spPr>
+        <p:txBody>
+          <a:bodyPr/>
+          <a:lstStyle/>
+          <a:p>
+            <a:pPr algn="ctr"/>
+            <a:r>
+              <a:rPr lang="en-US" sz="1200" b="1" dirty="0">
+                <a:solidFill>
+                  <a:srgbClr val="FFFFFF"/>
+                </a:solidFill>
+              </a:rPr>
+              <a:t>Operator</a:t>
+            </a:r>
+            <a:endParaRPr lang="en-US" sz="1200" dirty="0"/>
+          </a:p>
+          <a:p>
+            <a:endParaRPr lang="en-GB" sz="1200" dirty="0"/>
+          </a:p>
+        </p:txBody>
+      </p:sp>
+      <p:sp>
+        <p:nvSpPr>
+          <p:cNvPr id="67" name="Shape 37">
+            <a:extLst>
+              <a:ext uri="{FF2B5EF4-FFF2-40B4-BE49-F238E27FC236}">
+                <a16:creationId xmlns:a16="http://schemas.microsoft.com/office/drawing/2014/main" id="{227436CA-94D1-CCC7-AA75-48B8CDDAC1E0}"/>
+              </a:ext>
+            </a:extLst>
+          </p:cNvPr>
+          <p:cNvSpPr/>
+          <p:nvPr/>
+        </p:nvSpPr>
+        <p:spPr>
+          <a:xfrm>
+            <a:off x="5468112" y="3997452"/>
+            <a:ext cx="3529584" cy="818388"/>
           </a:xfrm>
           <a:prstGeom prst="rect">
             <a:avLst/>
@@ -7484,52 +7816,108 @@
           <a:bodyPr/>
           <a:lstStyle/>
           <a:p>
-            <a:endParaRPr lang="en-GB"/>
-          </a:p>
-        </p:txBody>
-      </p:sp>
-      <p:sp>
-        <p:nvSpPr>
-          <p:cNvPr id="48" name="Shape 38"/>
-          <p:cNvSpPr/>
-          <p:nvPr/>
-        </p:nvSpPr>
-        <p:spPr>
-          <a:xfrm>
-            <a:off x="5440680" y="2834640"/>
-            <a:ext cx="3520440" cy="54864"/>
-          </a:xfrm>
-          <a:prstGeom prst="rect">
-            <a:avLst/>
-          </a:prstGeom>
-          <a:solidFill>
-            <a:srgbClr val="1ABC9C"/>
-          </a:solidFill>
-          <a:ln w="12700">
-            <a:solidFill>
-              <a:srgbClr val="1ABC9C"/>
+            <a:r>
+              <a:rPr lang="en-GB" dirty="0">
+                <a:solidFill>
+                  <a:srgbClr val="19B697"/>
+                </a:solidFill>
+              </a:rPr>
+              <a:t>24 User stories implemented</a:t>
+            </a:r>
+          </a:p>
+        </p:txBody>
+      </p:sp>
+      <p:sp>
+        <p:nvSpPr>
+          <p:cNvPr id="76" name="Shape 32">
+            <a:extLst>
+              <a:ext uri="{FF2B5EF4-FFF2-40B4-BE49-F238E27FC236}">
+                <a16:creationId xmlns:a16="http://schemas.microsoft.com/office/drawing/2014/main" id="{D1AC8293-DD35-69AF-D5E1-91A7B470B181}"/>
+              </a:ext>
+            </a:extLst>
+          </p:cNvPr>
+          <p:cNvSpPr/>
+          <p:nvPr/>
+        </p:nvSpPr>
+        <p:spPr>
+          <a:xfrm>
+            <a:off x="5440680" y="2796540"/>
+            <a:ext cx="3547872" cy="868680"/>
+          </a:xfrm>
+          <a:prstGeom prst="rect">
+            <a:avLst/>
+          </a:prstGeom>
+          <a:solidFill>
+            <a:srgbClr val="FFFFFF"/>
+          </a:solidFill>
+          <a:ln w="19050">
+            <a:solidFill>
+              <a:srgbClr val="E67E22"/>
             </a:solidFill>
             <a:prstDash val="solid"/>
           </a:ln>
-        </p:spPr>
-        <p:txBody>
-          <a:bodyPr/>
-          <a:lstStyle/>
-          <a:p>
-            <a:endParaRPr lang="en-GB"/>
-          </a:p>
-        </p:txBody>
-      </p:sp>
-      <p:sp>
-        <p:nvSpPr>
-          <p:cNvPr id="49" name="Text 39"/>
-          <p:cNvSpPr/>
-          <p:nvPr/>
-        </p:nvSpPr>
-        <p:spPr>
-          <a:xfrm>
-            <a:off x="5440680" y="2889504"/>
-            <a:ext cx="3520440" cy="347472"/>
+          <a:effectLst>
+            <a:outerShdw blurRad="101600" dist="38100" dir="8100000" algn="bl" rotWithShape="0">
+              <a:srgbClr val="000000">
+                <a:alpha val="18000"/>
+              </a:srgbClr>
+            </a:outerShdw>
+          </a:effectLst>
+        </p:spPr>
+        <p:txBody>
+          <a:bodyPr/>
+          <a:lstStyle/>
+          <a:p>
+            <a:endParaRPr lang="en-GB" dirty="0"/>
+          </a:p>
+        </p:txBody>
+      </p:sp>
+      <p:pic>
+        <p:nvPicPr>
+          <p:cNvPr id="77" name="Image 7" descr="preencoded.png">
+            <a:extLst>
+              <a:ext uri="{FF2B5EF4-FFF2-40B4-BE49-F238E27FC236}">
+                <a16:creationId xmlns:a16="http://schemas.microsoft.com/office/drawing/2014/main" id="{BFD5AC58-FBCD-2830-015F-EB08CAE5A131}"/>
+              </a:ext>
+            </a:extLst>
+          </p:cNvPr>
+          <p:cNvPicPr>
+            <a:picLocks noChangeAspect="1"/>
+          </p:cNvPicPr>
+          <p:nvPr/>
+        </p:nvPicPr>
+        <p:blipFill>
+          <a:blip r:embed="rId8"/>
+          <a:stretch>
+            <a:fillRect/>
+          </a:stretch>
+        </p:blipFill>
+        <p:spPr>
+          <a:xfrm>
+            <a:off x="5538216" y="3025902"/>
+            <a:ext cx="384048" cy="384048"/>
+          </a:xfrm>
+          <a:prstGeom prst="rect">
+            <a:avLst/>
+          </a:prstGeom>
+        </p:spPr>
+      </p:pic>
+      <p:sp>
+        <p:nvSpPr>
+          <p:cNvPr id="78" name="Text 36">
+            <a:extLst>
+              <a:ext uri="{FF2B5EF4-FFF2-40B4-BE49-F238E27FC236}">
+                <a16:creationId xmlns:a16="http://schemas.microsoft.com/office/drawing/2014/main" id="{9F51F715-A13E-0088-F9F5-62773AF57769}"/>
+              </a:ext>
+            </a:extLst>
+          </p:cNvPr>
+          <p:cNvSpPr/>
+          <p:nvPr/>
+        </p:nvSpPr>
+        <p:spPr>
+          <a:xfrm>
+            <a:off x="5961888" y="2873502"/>
+            <a:ext cx="2112264" cy="644652"/>
           </a:xfrm>
           <a:prstGeom prst="rect">
             <a:avLst/>
@@ -7541,31 +7929,32 @@
           <a:bodyPr wrap="square" rtlCol="0" anchor="ctr"/>
           <a:lstStyle/>
           <a:p>
-            <a:pPr marL="0" indent="0" algn="ctr">
+            <a:pPr marL="0" indent="0">
               <a:buNone/>
             </a:pPr>
             <a:r>
-              <a:rPr lang="en-US" sz="1200" b="1" dirty="0">
-                <a:solidFill>
-                  <a:srgbClr val="FFFFFF"/>
-                </a:solidFill>
-              </a:rPr>
-              <a:t>User Story Summary</a:t>
-            </a:r>
-            <a:endParaRPr lang="en-US" sz="1200" dirty="0"/>
-          </a:p>
-        </p:txBody>
-      </p:sp>
-      <p:sp>
-        <p:nvSpPr>
-          <p:cNvPr id="50" name="Shape 40"/>
-          <p:cNvSpPr/>
-          <p:nvPr/>
-        </p:nvSpPr>
-        <p:spPr>
-          <a:xfrm>
-            <a:off x="5623560" y="3291840"/>
-            <a:ext cx="347472" cy="256032"/>
+              <a:rPr lang="en-US" sz="1200" dirty="0"/>
+              <a:t>Get notified each time an actuator state changes to be aware of what’s going on in the habitat</a:t>
+            </a:r>
+          </a:p>
+        </p:txBody>
+      </p:sp>
+      <p:sp>
+        <p:nvSpPr>
+          <p:cNvPr id="79" name="Shape 9">
+            <a:extLst>
+              <a:ext uri="{FF2B5EF4-FFF2-40B4-BE49-F238E27FC236}">
+                <a16:creationId xmlns:a16="http://schemas.microsoft.com/office/drawing/2014/main" id="{9BC0232B-CFA2-C784-75B2-F70A796A61E8}"/>
+              </a:ext>
+            </a:extLst>
+          </p:cNvPr>
+          <p:cNvSpPr/>
+          <p:nvPr/>
+        </p:nvSpPr>
+        <p:spPr>
+          <a:xfrm>
+            <a:off x="7909560" y="2962656"/>
+            <a:ext cx="914400" cy="210312"/>
           </a:xfrm>
           <a:prstGeom prst="rect">
             <a:avLst/>
@@ -7581,530 +7970,18 @@
           </a:ln>
         </p:spPr>
         <p:txBody>
-          <a:bodyPr/>
-          <a:lstStyle/>
-          <a:p>
-            <a:endParaRPr lang="en-GB"/>
-          </a:p>
-        </p:txBody>
-      </p:sp>
-      <p:sp>
-        <p:nvSpPr>
-          <p:cNvPr id="51" name="Text 41"/>
-          <p:cNvSpPr/>
-          <p:nvPr/>
-        </p:nvSpPr>
-        <p:spPr>
-          <a:xfrm>
-            <a:off x="5623560" y="3291840"/>
-            <a:ext cx="347472" cy="256032"/>
-          </a:xfrm>
-          <a:prstGeom prst="rect">
-            <a:avLst/>
-          </a:prstGeom>
-          <a:noFill/>
-          <a:ln/>
-        </p:spPr>
-        <p:txBody>
-          <a:bodyPr wrap="square" rtlCol="0" anchor="ctr"/>
-          <a:lstStyle/>
-          <a:p>
-            <a:pPr marL="0" indent="0" algn="ctr">
-              <a:buNone/>
-            </a:pPr>
-            <a:r>
-              <a:rPr lang="en-US" sz="1200" b="1" dirty="0">
-                <a:solidFill>
-                  <a:srgbClr val="FFFFFF"/>
-                </a:solidFill>
-              </a:rPr>
-              <a:t>8</a:t>
-            </a:r>
-            <a:endParaRPr lang="en-US" sz="1200" dirty="0"/>
-          </a:p>
-        </p:txBody>
-      </p:sp>
-      <p:sp>
-        <p:nvSpPr>
-          <p:cNvPr id="52" name="Text 42"/>
-          <p:cNvSpPr/>
-          <p:nvPr/>
-        </p:nvSpPr>
-        <p:spPr>
-          <a:xfrm>
-            <a:off x="6053328" y="3291840"/>
-            <a:ext cx="2697480" cy="256032"/>
-          </a:xfrm>
-          <a:prstGeom prst="rect">
-            <a:avLst/>
-          </a:prstGeom>
-          <a:noFill/>
-          <a:ln/>
-        </p:spPr>
-        <p:txBody>
-          <a:bodyPr wrap="square" rtlCol="0" anchor="ctr"/>
-          <a:lstStyle/>
-          <a:p>
-            <a:pPr marL="0" indent="0">
-              <a:buNone/>
-            </a:pPr>
-            <a:r>
-              <a:rPr lang="en-US" sz="1200" dirty="0">
-                <a:solidFill>
-                  <a:srgbClr val="E8ECF2"/>
-                </a:solidFill>
-              </a:rPr>
-              <a:t>Dashboard &amp; Monitoring</a:t>
-            </a:r>
-            <a:endParaRPr lang="en-US" sz="1200" dirty="0"/>
-          </a:p>
-        </p:txBody>
-      </p:sp>
-      <p:sp>
-        <p:nvSpPr>
-          <p:cNvPr id="53" name="Shape 43"/>
-          <p:cNvSpPr/>
-          <p:nvPr/>
-        </p:nvSpPr>
-        <p:spPr>
-          <a:xfrm>
-            <a:off x="5623560" y="3639312"/>
-            <a:ext cx="347472" cy="256032"/>
-          </a:xfrm>
-          <a:prstGeom prst="rect">
-            <a:avLst/>
-          </a:prstGeom>
-          <a:solidFill>
-            <a:srgbClr val="E67E22"/>
-          </a:solidFill>
-          <a:ln w="12700">
-            <a:solidFill>
-              <a:srgbClr val="E67E22"/>
-            </a:solidFill>
-            <a:prstDash val="solid"/>
-          </a:ln>
-        </p:spPr>
-        <p:txBody>
-          <a:bodyPr/>
-          <a:lstStyle/>
-          <a:p>
-            <a:endParaRPr lang="en-GB"/>
-          </a:p>
-        </p:txBody>
-      </p:sp>
-      <p:sp>
-        <p:nvSpPr>
-          <p:cNvPr id="54" name="Text 44"/>
-          <p:cNvSpPr/>
-          <p:nvPr/>
-        </p:nvSpPr>
-        <p:spPr>
-          <a:xfrm>
-            <a:off x="5623560" y="3639312"/>
-            <a:ext cx="347472" cy="256032"/>
-          </a:xfrm>
-          <a:prstGeom prst="rect">
-            <a:avLst/>
-          </a:prstGeom>
-          <a:noFill/>
-          <a:ln/>
-        </p:spPr>
-        <p:txBody>
-          <a:bodyPr wrap="square" rtlCol="0" anchor="ctr"/>
-          <a:lstStyle/>
-          <a:p>
-            <a:pPr marL="0" indent="0" algn="ctr">
-              <a:buNone/>
-            </a:pPr>
-            <a:r>
-              <a:rPr lang="en-US" sz="1200" b="1" dirty="0">
-                <a:solidFill>
-                  <a:srgbClr val="FFFFFF"/>
-                </a:solidFill>
-              </a:rPr>
-              <a:t>7</a:t>
-            </a:r>
-            <a:endParaRPr lang="en-US" sz="1200" dirty="0"/>
-          </a:p>
-        </p:txBody>
-      </p:sp>
-      <p:sp>
-        <p:nvSpPr>
-          <p:cNvPr id="55" name="Text 45"/>
-          <p:cNvSpPr/>
-          <p:nvPr/>
-        </p:nvSpPr>
-        <p:spPr>
-          <a:xfrm>
-            <a:off x="6053328" y="3639312"/>
-            <a:ext cx="2697480" cy="256032"/>
-          </a:xfrm>
-          <a:prstGeom prst="rect">
-            <a:avLst/>
-          </a:prstGeom>
-          <a:noFill/>
-          <a:ln/>
-        </p:spPr>
-        <p:txBody>
-          <a:bodyPr wrap="square" rtlCol="0" anchor="ctr"/>
-          <a:lstStyle/>
-          <a:p>
-            <a:pPr marL="0" indent="0">
-              <a:buNone/>
-            </a:pPr>
-            <a:r>
-              <a:rPr lang="en-US" sz="1200" dirty="0">
-                <a:solidFill>
-                  <a:srgbClr val="E8ECF2"/>
-                </a:solidFill>
-              </a:rPr>
-              <a:t>Rule Management (CRUD)</a:t>
-            </a:r>
-            <a:endParaRPr lang="en-US" sz="1200" dirty="0"/>
-          </a:p>
-        </p:txBody>
-      </p:sp>
-      <p:sp>
-        <p:nvSpPr>
-          <p:cNvPr id="56" name="Shape 46"/>
-          <p:cNvSpPr/>
-          <p:nvPr/>
-        </p:nvSpPr>
-        <p:spPr>
-          <a:xfrm>
-            <a:off x="5623560" y="3986784"/>
-            <a:ext cx="347472" cy="256032"/>
-          </a:xfrm>
-          <a:prstGeom prst="rect">
-            <a:avLst/>
-          </a:prstGeom>
-          <a:solidFill>
-            <a:srgbClr val="1ABC9C"/>
-          </a:solidFill>
-          <a:ln w="12700">
-            <a:solidFill>
-              <a:srgbClr val="1ABC9C"/>
-            </a:solidFill>
-            <a:prstDash val="solid"/>
-          </a:ln>
-        </p:spPr>
-        <p:txBody>
-          <a:bodyPr/>
-          <a:lstStyle/>
-          <a:p>
-            <a:endParaRPr lang="en-GB"/>
-          </a:p>
-        </p:txBody>
-      </p:sp>
-      <p:sp>
-        <p:nvSpPr>
-          <p:cNvPr id="57" name="Text 47"/>
-          <p:cNvSpPr/>
-          <p:nvPr/>
-        </p:nvSpPr>
-        <p:spPr>
-          <a:xfrm>
-            <a:off x="5623560" y="3986784"/>
-            <a:ext cx="347472" cy="256032"/>
-          </a:xfrm>
-          <a:prstGeom prst="rect">
-            <a:avLst/>
-          </a:prstGeom>
-          <a:noFill/>
-          <a:ln/>
-        </p:spPr>
-        <p:txBody>
-          <a:bodyPr wrap="square" rtlCol="0" anchor="ctr"/>
-          <a:lstStyle/>
-          <a:p>
-            <a:pPr marL="0" indent="0" algn="ctr">
-              <a:buNone/>
-            </a:pPr>
-            <a:r>
-              <a:rPr lang="en-US" sz="1200" b="1" dirty="0">
-                <a:solidFill>
-                  <a:srgbClr val="FFFFFF"/>
-                </a:solidFill>
-              </a:rPr>
-              <a:t>5</a:t>
-            </a:r>
-            <a:endParaRPr lang="en-US" sz="1200" dirty="0"/>
-          </a:p>
-        </p:txBody>
-      </p:sp>
-      <p:sp>
-        <p:nvSpPr>
-          <p:cNvPr id="58" name="Text 48"/>
-          <p:cNvSpPr/>
-          <p:nvPr/>
-        </p:nvSpPr>
-        <p:spPr>
-          <a:xfrm>
-            <a:off x="6053328" y="3986784"/>
-            <a:ext cx="2697480" cy="256032"/>
-          </a:xfrm>
-          <a:prstGeom prst="rect">
-            <a:avLst/>
-          </a:prstGeom>
-          <a:noFill/>
-          <a:ln/>
-        </p:spPr>
-        <p:txBody>
-          <a:bodyPr wrap="square" rtlCol="0" anchor="ctr"/>
-          <a:lstStyle/>
-          <a:p>
-            <a:pPr marL="0" indent="0">
-              <a:buNone/>
-            </a:pPr>
-            <a:r>
-              <a:rPr lang="en-US" sz="1200" dirty="0">
-                <a:solidFill>
-                  <a:srgbClr val="E8ECF2"/>
-                </a:solidFill>
-              </a:rPr>
-              <a:t>System Resilience</a:t>
-            </a:r>
-            <a:endParaRPr lang="en-US" sz="1200" dirty="0"/>
-          </a:p>
-        </p:txBody>
-      </p:sp>
-      <p:sp>
-        <p:nvSpPr>
-          <p:cNvPr id="59" name="Shape 49"/>
-          <p:cNvSpPr/>
-          <p:nvPr/>
-        </p:nvSpPr>
-        <p:spPr>
-          <a:xfrm>
-            <a:off x="5623560" y="4334256"/>
-            <a:ext cx="347472" cy="256032"/>
-          </a:xfrm>
-          <a:prstGeom prst="rect">
-            <a:avLst/>
-          </a:prstGeom>
-          <a:solidFill>
-            <a:srgbClr val="E67E22"/>
-          </a:solidFill>
-          <a:ln w="12700">
-            <a:solidFill>
-              <a:srgbClr val="E67E22"/>
-            </a:solidFill>
-            <a:prstDash val="solid"/>
-          </a:ln>
-        </p:spPr>
-        <p:txBody>
-          <a:bodyPr/>
-          <a:lstStyle/>
-          <a:p>
-            <a:endParaRPr lang="en-GB"/>
-          </a:p>
-        </p:txBody>
-      </p:sp>
-      <p:sp>
-        <p:nvSpPr>
-          <p:cNvPr id="60" name="Text 50"/>
-          <p:cNvSpPr/>
-          <p:nvPr/>
-        </p:nvSpPr>
-        <p:spPr>
-          <a:xfrm>
-            <a:off x="5623560" y="4334256"/>
-            <a:ext cx="347472" cy="256032"/>
-          </a:xfrm>
-          <a:prstGeom prst="rect">
-            <a:avLst/>
-          </a:prstGeom>
-          <a:noFill/>
-          <a:ln/>
-        </p:spPr>
-        <p:txBody>
-          <a:bodyPr wrap="square" rtlCol="0" anchor="ctr"/>
-          <a:lstStyle/>
-          <a:p>
-            <a:pPr marL="0" indent="0" algn="ctr">
-              <a:buNone/>
-            </a:pPr>
-            <a:r>
-              <a:rPr lang="en-US" sz="1200" b="1" dirty="0">
-                <a:solidFill>
-                  <a:srgbClr val="FFFFFF"/>
-                </a:solidFill>
-              </a:rPr>
-              <a:t>2</a:t>
-            </a:r>
-            <a:endParaRPr lang="en-US" sz="1200" dirty="0"/>
-          </a:p>
-        </p:txBody>
-      </p:sp>
-      <p:sp>
-        <p:nvSpPr>
-          <p:cNvPr id="61" name="Text 51"/>
-          <p:cNvSpPr/>
-          <p:nvPr/>
-        </p:nvSpPr>
-        <p:spPr>
-          <a:xfrm>
-            <a:off x="6053328" y="4334256"/>
-            <a:ext cx="2697480" cy="256032"/>
-          </a:xfrm>
-          <a:prstGeom prst="rect">
-            <a:avLst/>
-          </a:prstGeom>
-          <a:noFill/>
-          <a:ln/>
-        </p:spPr>
-        <p:txBody>
-          <a:bodyPr wrap="square" rtlCol="0" anchor="ctr"/>
-          <a:lstStyle/>
-          <a:p>
-            <a:pPr marL="0" indent="0">
-              <a:buNone/>
-            </a:pPr>
-            <a:r>
-              <a:rPr lang="en-US" sz="1200" dirty="0">
-                <a:solidFill>
-                  <a:srgbClr val="E8ECF2"/>
-                </a:solidFill>
-              </a:rPr>
-              <a:t>Config &amp; Actuators</a:t>
-            </a:r>
-            <a:endParaRPr lang="en-US" sz="1200" dirty="0"/>
-          </a:p>
-        </p:txBody>
-      </p:sp>
-      <p:sp>
-        <p:nvSpPr>
-          <p:cNvPr id="62" name="Shape 52"/>
-          <p:cNvSpPr/>
-          <p:nvPr/>
-        </p:nvSpPr>
-        <p:spPr>
-          <a:xfrm>
-            <a:off x="5577840" y="4663440"/>
-            <a:ext cx="3246120" cy="64008"/>
-          </a:xfrm>
-          <a:prstGeom prst="rect">
-            <a:avLst/>
-          </a:prstGeom>
-          <a:solidFill>
-            <a:srgbClr val="1A2A4A"/>
-          </a:solidFill>
-          <a:ln w="12700">
-            <a:solidFill>
-              <a:srgbClr val="1A2A4A"/>
-            </a:solidFill>
-            <a:prstDash val="solid"/>
-          </a:ln>
-        </p:spPr>
-        <p:txBody>
-          <a:bodyPr/>
-          <a:lstStyle/>
-          <a:p>
-            <a:endParaRPr lang="en-GB"/>
-          </a:p>
-        </p:txBody>
-      </p:sp>
-      <p:sp>
-        <p:nvSpPr>
-          <p:cNvPr id="63" name="Text 53"/>
-          <p:cNvSpPr/>
-          <p:nvPr/>
-        </p:nvSpPr>
-        <p:spPr>
-          <a:xfrm>
-            <a:off x="5577840" y="4485132"/>
-            <a:ext cx="3246120" cy="320040"/>
-          </a:xfrm>
-          <a:prstGeom prst="rect">
-            <a:avLst/>
-          </a:prstGeom>
-          <a:noFill/>
-          <a:ln/>
-        </p:spPr>
-        <p:txBody>
-          <a:bodyPr wrap="square" rtlCol="0" anchor="ctr"/>
-          <a:lstStyle/>
-          <a:p>
-            <a:pPr marL="0" indent="0" algn="ctr">
-              <a:buNone/>
-            </a:pPr>
-            <a:r>
-              <a:rPr lang="en-US" sz="1200" b="1" dirty="0">
-                <a:solidFill>
-                  <a:srgbClr val="1ABC9C"/>
-                </a:solidFill>
-              </a:rPr>
-              <a:t>24 user stories implemented</a:t>
-            </a:r>
-            <a:endParaRPr lang="en-US" sz="1200" dirty="0"/>
-          </a:p>
-        </p:txBody>
-      </p:sp>
-      <p:sp>
-        <p:nvSpPr>
-          <p:cNvPr id="64" name="Shape 54"/>
-          <p:cNvSpPr/>
-          <p:nvPr/>
-        </p:nvSpPr>
-        <p:spPr>
-          <a:xfrm>
-            <a:off x="0" y="4937760"/>
-            <a:ext cx="9144000" cy="205740"/>
-          </a:xfrm>
-          <a:prstGeom prst="rect">
-            <a:avLst/>
-          </a:prstGeom>
-          <a:solidFill>
-            <a:srgbClr val="0D1B3E"/>
-          </a:solidFill>
-          <a:ln w="12700">
-            <a:solidFill>
-              <a:srgbClr val="0D1B3E"/>
-            </a:solidFill>
-            <a:prstDash val="solid"/>
-          </a:ln>
-        </p:spPr>
-        <p:txBody>
-          <a:bodyPr/>
-          <a:lstStyle/>
-          <a:p>
-            <a:endParaRPr lang="en-GB"/>
-          </a:p>
-        </p:txBody>
-      </p:sp>
-      <p:sp>
-        <p:nvSpPr>
-          <p:cNvPr id="65" name="Text 55"/>
-          <p:cNvSpPr/>
-          <p:nvPr/>
-        </p:nvSpPr>
-        <p:spPr>
-          <a:xfrm>
-            <a:off x="0" y="4937760"/>
-            <a:ext cx="9144000" cy="205740"/>
-          </a:xfrm>
-          <a:prstGeom prst="rect">
-            <a:avLst/>
-          </a:prstGeom>
-          <a:noFill/>
-          <a:ln/>
-        </p:spPr>
-        <p:txBody>
-          <a:bodyPr wrap="square" rtlCol="0" anchor="ctr"/>
-          <a:lstStyle/>
-          <a:p>
-            <a:pPr marL="0" indent="0" algn="ctr">
-              <a:buNone/>
-            </a:pPr>
-            <a:r>
-              <a:rPr lang="en-US" sz="1200" dirty="0">
-                <a:solidFill>
-                  <a:srgbClr val="8899AA"/>
-                </a:solidFill>
-              </a:rPr>
-              <a:t>Mars Automation Platform  ·  Lab Advanced Programming 2025/2026</a:t>
-            </a:r>
-            <a:endParaRPr lang="en-US" sz="1200" dirty="0"/>
+          <a:bodyPr anchor="ctr"/>
+          <a:lstStyle/>
+          <a:p>
+            <a:pPr algn="ctr"/>
+            <a:r>
+              <a:rPr lang="en-GB" sz="1200" b="1" dirty="0">
+                <a:solidFill>
+                  <a:schemeClr val="bg1"/>
+                </a:solidFill>
+              </a:rPr>
+              <a:t>Operator</a:t>
+            </a:r>
           </a:p>
         </p:txBody>
       </p:sp>
